--- a/docs/答辩PPT-纽约公共自行车数据分析.pptx
+++ b/docs/答辩PPT-纽约公共自行车数据分析.pptx
@@ -3198,7 +3198,7 @@
           </a:p>
           <a:p>
             <a:r>
-              <a:t>官方数据：2026 年 6-7 月，974MB / 499 万条行程</a:t>
+              <a:t>官方数据：2026 年 7 月（202607），974MB / 499 万条行程</a:t>
             </a:r>
           </a:p>
           <a:p>

--- a/docs/答辩PPT-纽约公共自行车数据分析.pptx
+++ b/docs/答辩PPT-纽约公共自行车数据分析.pptx
@@ -3462,7 +3462,7 @@
           </a:p>
           <a:p>
             <a:r>
-              <a:t>工作日约为周末 2.6 倍；热点集中于曼哈顿中城/下城</a:t>
+              <a:t>工作日总量约为周末 3.1 倍；热点集中于曼哈顿中城/下城</a:t>
             </a:r>
           </a:p>
         </p:txBody>
